--- a/videos/machine-learning/03_ridger_regression_gradient_descent/recreated_pptx/slide_005_recreated.pptx
+++ b/videos/machine-learning/03_ridger_regression_gradient_descent/recreated_pptx/slide_005_recreated.pptx
@@ -1131,7 +1131,7 @@
       </p:sp>
       <p:pic>
         <p:nvPicPr>
-          <p:cNvPr id="10" name="Image 0" descr="/workspaces/codespaces-blank/ai_llm_slides/videos/machine-learning/03_ridger_regression_gradient_descent/recreated_pptx/build/assets/eq_005_loss1.png">    </p:cNvPr>
+          <p:cNvPr id="10" name="Image 0" descr="/home/ahmed/Projects/ai_llm_slides/videos/machine-learning/03_ridger_regression_gradient_descent/recreated_pptx/build/assets/eq_005_loss1.png">    </p:cNvPr>
           <p:cNvPicPr>
             <a:picLocks noChangeAspect="1"/>
           </p:cNvPicPr>
@@ -1145,8 +1145,8 @@
         </p:blipFill>
         <p:spPr>
           <a:xfrm>
-            <a:off x="1226149" y="1360604"/>
-            <a:ext cx="5713800" cy="568093"/>
+            <a:off x="1226144" y="1360558"/>
+            <a:ext cx="5713816" cy="568184"/>
           </a:xfrm>
           <a:prstGeom prst="rect">
             <a:avLst/>
@@ -1155,7 +1155,7 @@
       </p:pic>
       <p:pic>
         <p:nvPicPr>
-          <p:cNvPr id="11" name="Image 1" descr="/workspaces/codespaces-blank/ai_llm_slides/videos/machine-learning/03_ridger_regression_gradient_descent/recreated_pptx/build/assets/eq_005_loss2.png">    </p:cNvPr>
+          <p:cNvPr id="11" name="Image 1" descr="/home/ahmed/Projects/ai_llm_slides/videos/machine-learning/03_ridger_regression_gradient_descent/recreated_pptx/build/assets/eq_005_loss2.png">    </p:cNvPr>
           <p:cNvPicPr>
             <a:picLocks noChangeAspect="1"/>
           </p:cNvPicPr>
@@ -1179,7 +1179,7 @@
       </p:pic>
       <p:pic>
         <p:nvPicPr>
-          <p:cNvPr id="12" name="Image 2" descr="/workspaces/codespaces-blank/ai_llm_slides/videos/machine-learning/03_ridger_regression_gradient_descent/recreated_pptx/build/assets/eq_005_loss3.png">    </p:cNvPr>
+          <p:cNvPr id="12" name="Image 2" descr="/home/ahmed/Projects/ai_llm_slides/videos/machine-learning/03_ridger_regression_gradient_descent/recreated_pptx/build/assets/eq_005_loss3.png">    </p:cNvPr>
           <p:cNvPicPr>
             <a:picLocks noChangeAspect="1"/>
           </p:cNvPicPr>
@@ -1193,8 +1193,8 @@
         </p:blipFill>
         <p:spPr>
           <a:xfrm>
-            <a:off x="1226089" y="2899625"/>
-            <a:ext cx="5434525" cy="563451"/>
+            <a:off x="1226084" y="2899591"/>
+            <a:ext cx="5434533" cy="563519"/>
           </a:xfrm>
           <a:prstGeom prst="rect">
             <a:avLst/>
@@ -1298,39 +1298,14 @@
             <a:r>
               <a:rPr lang="en-US" sz="1400" dirty="0">
                 <a:solidFill>
-                  <a:srgbClr val="000000"/>
+                  <a:srgbClr val="FF0000"/>
                 </a:solidFill>
                 <a:latin typeface="DejaVu Sans" pitchFamily="34" charset="0"/>
                 <a:ea typeface="DejaVu Sans" pitchFamily="34" charset="-122"/>
                 <a:cs typeface="DejaVu Sans" pitchFamily="34" charset="-120"/>
               </a:rPr>
-              <a:t>X is a matrix, W is a vector,</a:t>
+              <a:t>X</a:t>
             </a:r>
-            <a:endParaRPr lang="en-US" sz="1400" dirty="0"/>
-          </a:p>
-        </p:txBody>
-      </p:sp>
-      <p:sp>
-        <p:nvSpPr>
-          <p:cNvPr id="16" name="Text 11"/>
-          <p:cNvSpPr/>
-          <p:nvPr/>
-        </p:nvSpPr>
-        <p:spPr>
-          <a:xfrm>
-            <a:off x="8648700" y="2273300"/>
-            <a:ext cx="1905000" cy="330200"/>
-          </a:xfrm>
-          <a:prstGeom prst="rect">
-            <a:avLst/>
-          </a:prstGeom>
-          <a:noFill/>
-          <a:ln/>
-        </p:spPr>
-        <p:txBody>
-          <a:bodyPr wrap="square" lIns="0" tIns="0" rIns="0" bIns="0" rtlCol="0" anchor="t"/>
-          <a:lstStyle/>
-          <a:p>
             <a:pPr algn="l" indent="0" marL="0">
               <a:lnSpc>
                 <a:spcPts val="1400"/>
@@ -1346,15 +1321,108 @@
                 <a:ea typeface="DejaVu Sans" pitchFamily="34" charset="-122"/>
                 <a:cs typeface="DejaVu Sans" pitchFamily="34" charset="-120"/>
               </a:rPr>
-              <a:t>XW is a vector</a:t>
+              <a:t> is a matrix, </a:t>
+            </a:r>
+            <a:pPr algn="l" indent="0" marL="0">
+              <a:lnSpc>
+                <a:spcPts val="1400"/>
+              </a:lnSpc>
+              <a:buNone/>
+            </a:pPr>
+            <a:r>
+              <a:rPr lang="en-US" sz="1400" u="sng" dirty="0">
+                <a:solidFill>
+                  <a:srgbClr val="3736BB"/>
+                </a:solidFill>
+                <a:latin typeface="DejaVu Sans" pitchFamily="34" charset="0"/>
+                <a:ea typeface="DejaVu Sans" pitchFamily="34" charset="-122"/>
+                <a:cs typeface="DejaVu Sans" pitchFamily="34" charset="-120"/>
+              </a:rPr>
+              <a:t>W</a:t>
+            </a:r>
+            <a:pPr algn="l" indent="0" marL="0">
+              <a:lnSpc>
+                <a:spcPts val="1400"/>
+              </a:lnSpc>
+              <a:buNone/>
+            </a:pPr>
+            <a:r>
+              <a:rPr lang="en-US" sz="1400" dirty="0">
+                <a:solidFill>
+                  <a:srgbClr val="000000"/>
+                </a:solidFill>
+                <a:latin typeface="DejaVu Sans" pitchFamily="34" charset="0"/>
+                <a:ea typeface="DejaVu Sans" pitchFamily="34" charset="-122"/>
+                <a:cs typeface="DejaVu Sans" pitchFamily="34" charset="-120"/>
+              </a:rPr>
+              <a:t> is a vector,</a:t>
             </a:r>
             <a:endParaRPr lang="en-US" sz="1400" dirty="0"/>
           </a:p>
         </p:txBody>
       </p:sp>
+      <p:sp>
+        <p:nvSpPr>
+          <p:cNvPr id="16" name="Text 11"/>
+          <p:cNvSpPr/>
+          <p:nvPr/>
+        </p:nvSpPr>
+        <p:spPr>
+          <a:xfrm>
+            <a:off x="8648700" y="2273300"/>
+            <a:ext cx="1905000" cy="330200"/>
+          </a:xfrm>
+          <a:prstGeom prst="rect">
+            <a:avLst/>
+          </a:prstGeom>
+          <a:noFill/>
+          <a:ln/>
+        </p:spPr>
+        <p:txBody>
+          <a:bodyPr wrap="square" lIns="0" tIns="0" rIns="0" bIns="0" rtlCol="0" anchor="t"/>
+          <a:lstStyle/>
+          <a:p>
+            <a:pPr algn="l" indent="0" marL="0">
+              <a:lnSpc>
+                <a:spcPts val="1400"/>
+              </a:lnSpc>
+              <a:buNone/>
+            </a:pPr>
+            <a:r>
+              <a:rPr lang="en-US" sz="1400" u="sng" dirty="0">
+                <a:solidFill>
+                  <a:srgbClr val="000000"/>
+                </a:solidFill>
+                <a:latin typeface="DejaVu Sans" pitchFamily="34" charset="0"/>
+                <a:ea typeface="DejaVu Sans" pitchFamily="34" charset="-122"/>
+                <a:cs typeface="DejaVu Sans" pitchFamily="34" charset="-120"/>
+              </a:rPr>
+              <a:t>XW</a:t>
+            </a:r>
+            <a:pPr algn="l" indent="0" marL="0">
+              <a:lnSpc>
+                <a:spcPts val="1400"/>
+              </a:lnSpc>
+              <a:buNone/>
+            </a:pPr>
+            <a:r>
+              <a:rPr lang="en-US" sz="1400" dirty="0">
+                <a:solidFill>
+                  <a:srgbClr val="000000"/>
+                </a:solidFill>
+                <a:latin typeface="DejaVu Sans" pitchFamily="34" charset="0"/>
+                <a:ea typeface="DejaVu Sans" pitchFamily="34" charset="-122"/>
+                <a:cs typeface="DejaVu Sans" pitchFamily="34" charset="-120"/>
+              </a:rPr>
+              <a:t> is a vector</a:t>
+            </a:r>
+            <a:endParaRPr lang="en-US" sz="1400" dirty="0"/>
+          </a:p>
+        </p:txBody>
+      </p:sp>
       <p:pic>
         <p:nvPicPr>
-          <p:cNvPr id="17" name="Image 3" descr="/workspaces/codespaces-blank/ai_llm_slides/videos/machine-learning/03_ridger_regression_gradient_descent/recreated_pptx/build/assets/eq_005_remember1.png">    </p:cNvPr>
+          <p:cNvPr id="17" name="Image 3" descr="/home/ahmed/Projects/ai_llm_slides/videos/machine-learning/03_ridger_regression_gradient_descent/recreated_pptx/build/assets/eq_005_remember1.png">    </p:cNvPr>
           <p:cNvPicPr>
             <a:picLocks noChangeAspect="1"/>
           </p:cNvPicPr>
@@ -1368,8 +1436,8 @@
         </p:blipFill>
         <p:spPr>
           <a:xfrm>
-            <a:off x="8617775" y="2680400"/>
-            <a:ext cx="2385947" cy="328801"/>
+            <a:off x="8617585" y="2680587"/>
+            <a:ext cx="2386334" cy="328426"/>
           </a:xfrm>
           <a:prstGeom prst="rect">
             <a:avLst/>
@@ -1403,7 +1471,7 @@
       </p:sp>
       <p:pic>
         <p:nvPicPr>
-          <p:cNvPr id="19" name="Image 4" descr="/workspaces/codespaces-blank/ai_llm_slides/videos/machine-learning/03_ridger_regression_gradient_descent/recreated_pptx/build/assets/eq_005_pinkfrac.png">    </p:cNvPr>
+          <p:cNvPr id="19" name="Image 4" descr="/home/ahmed/Projects/ai_llm_slides/videos/machine-learning/03_ridger_regression_gradient_descent/recreated_pptx/build/assets/eq_005_pinkfrac.png">    </p:cNvPr>
           <p:cNvPicPr>
             <a:picLocks noChangeAspect="1"/>
           </p:cNvPicPr>
@@ -1417,8 +1485,8 @@
         </p:blipFill>
         <p:spPr>
           <a:xfrm>
-            <a:off x="984250" y="3707162"/>
-            <a:ext cx="1130303" cy="612077"/>
+            <a:off x="984250" y="3707039"/>
+            <a:ext cx="1130303" cy="612321"/>
           </a:xfrm>
           <a:prstGeom prst="rect">
             <a:avLst/>
@@ -1461,7 +1529,41 @@
                 <a:ea typeface="DejaVu Sans" pitchFamily="34" charset="-122"/>
                 <a:cs typeface="DejaVu Sans" pitchFamily="34" charset="-120"/>
               </a:rPr>
-              <a:t>Get Best W that minimizes the loss</a:t>
+              <a:t>Get Best </a:t>
+            </a:r>
+            <a:pPr algn="l" indent="0" marL="0">
+              <a:lnSpc>
+                <a:spcPts val="1740"/>
+              </a:lnSpc>
+              <a:buNone/>
+            </a:pPr>
+            <a:r>
+              <a:rPr lang="en-US" sz="1740" b="1" dirty="0">
+                <a:solidFill>
+                  <a:srgbClr val="FF0000"/>
+                </a:solidFill>
+                <a:latin typeface="DejaVu Sans" pitchFamily="34" charset="0"/>
+                <a:ea typeface="DejaVu Sans" pitchFamily="34" charset="-122"/>
+                <a:cs typeface="DejaVu Sans" pitchFamily="34" charset="-120"/>
+              </a:rPr>
+              <a:t>W</a:t>
+            </a:r>
+            <a:pPr algn="l" indent="0" marL="0">
+              <a:lnSpc>
+                <a:spcPts val="1740"/>
+              </a:lnSpc>
+              <a:buNone/>
+            </a:pPr>
+            <a:r>
+              <a:rPr lang="en-US" sz="1740" dirty="0">
+                <a:solidFill>
+                  <a:srgbClr val="000000"/>
+                </a:solidFill>
+                <a:latin typeface="DejaVu Sans" pitchFamily="34" charset="0"/>
+                <a:ea typeface="DejaVu Sans" pitchFamily="34" charset="-122"/>
+                <a:cs typeface="DejaVu Sans" pitchFamily="34" charset="-120"/>
+              </a:rPr>
+              <a:t> that minimizes the loss</a:t>
             </a:r>
             <a:endParaRPr lang="en-US" sz="1740" dirty="0"/>
           </a:p>
@@ -1494,7 +1596,7 @@
       </p:sp>
       <p:pic>
         <p:nvPicPr>
-          <p:cNvPr id="22" name="Image 5" descr="/workspaces/codespaces-blank/ai_llm_slides/videos/machine-learning/03_ridger_regression_gradient_descent/recreated_pptx/build/assets/eq_005_deriv1.png">    </p:cNvPr>
+          <p:cNvPr id="22" name="Image 5" descr="/home/ahmed/Projects/ai_llm_slides/videos/machine-learning/03_ridger_regression_gradient_descent/recreated_pptx/build/assets/eq_005_deriv1.png">    </p:cNvPr>
           <p:cNvPicPr>
             <a:picLocks noChangeAspect="1"/>
           </p:cNvPicPr>
@@ -1518,7 +1620,7 @@
       </p:pic>
       <p:pic>
         <p:nvPicPr>
-          <p:cNvPr id="23" name="Image 6" descr="/workspaces/codespaces-blank/ai_llm_slides/videos/machine-learning/03_ridger_regression_gradient_descent/recreated_pptx/build/assets/eq_005_deriv2.png">    </p:cNvPr>
+          <p:cNvPr id="23" name="Image 6" descr="/home/ahmed/Projects/ai_llm_slides/videos/machine-learning/03_ridger_regression_gradient_descent/recreated_pptx/build/assets/eq_005_deriv2.png">    </p:cNvPr>
           <p:cNvPicPr>
             <a:picLocks noChangeAspect="1"/>
           </p:cNvPicPr>
@@ -1609,7 +1711,7 @@
       </p:sp>
       <p:pic>
         <p:nvPicPr>
-          <p:cNvPr id="26" name="Image 7" descr="/workspaces/codespaces-blank/ai_llm_slides/videos/machine-learning/03_ridger_regression_gradient_descent/recreated_pptx/build/assets/eq_005_remember2.png">    </p:cNvPr>
+          <p:cNvPr id="26" name="Image 7" descr="/home/ahmed/Projects/ai_llm_slides/videos/machine-learning/03_ridger_regression_gradient_descent/recreated_pptx/build/assets/eq_005_remember2.png">    </p:cNvPr>
           <p:cNvPicPr>
             <a:picLocks noChangeAspect="1"/>
           </p:cNvPicPr>
@@ -1623,8 +1725,8 @@
         </p:blipFill>
         <p:spPr>
           <a:xfrm>
-            <a:off x="8363782" y="4991806"/>
-            <a:ext cx="2678036" cy="366889"/>
+            <a:off x="8369841" y="4997863"/>
+            <a:ext cx="2665915" cy="354773"/>
           </a:xfrm>
           <a:prstGeom prst="rect">
             <a:avLst/>
@@ -1658,7 +1760,7 @@
       </p:sp>
       <p:pic>
         <p:nvPicPr>
-          <p:cNvPr id="28" name="Image 8" descr="/workspaces/codespaces-blank/ai_llm_slides/videos/machine-learning/03_ridger_regression_gradient_descent/recreated_pptx/build/assets/eq_005_finalw.png">    </p:cNvPr>
+          <p:cNvPr id="28" name="Image 8" descr="/home/ahmed/Projects/ai_llm_slides/videos/machine-learning/03_ridger_regression_gradient_descent/recreated_pptx/build/assets/eq_005_finalw.png">    </p:cNvPr>
           <p:cNvPicPr>
             <a:picLocks noChangeAspect="1"/>
           </p:cNvPicPr>
@@ -1672,8 +1774,8 @@
         </p:blipFill>
         <p:spPr>
           <a:xfrm>
-            <a:off x="8744572" y="5875760"/>
-            <a:ext cx="2437157" cy="465879"/>
+            <a:off x="8744560" y="5875647"/>
+            <a:ext cx="2437177" cy="466106"/>
           </a:xfrm>
           <a:prstGeom prst="rect">
             <a:avLst/>
